--- a/Curriculo/Fase2_Basico1/decks/Basico1_S07_Kiran.pptx
+++ b/Curriculo/Fase2_Basico1/decks/Basico1_S07_Kiran.pptx
@@ -139,7 +139,7 @@
   <p:extLst>
     <p:ext uri="{521415D9-36F7-43E2-AB2F-B90AF26B5E84}">
       <p14:sectionLst xmlns:p14="http://schemas.microsoft.com/office/powerpoint/2010/main">
-        <p14:section name="Semana 7" id="{C39C94C2-5AE3-BE35-F878-687DC54230FC}">
+        <p14:section name="Semana 7" id="{6A19CB79-634E-153E-5B19-92B40CAB670E}">
           <p14:sldIdLst>
             <p14:sldId id="256"/>
             <p14:sldId id="257"/>
@@ -210,7 +210,7 @@
     </p:spTree>
     <p:extLst>
       <p:ext uri="{BB962C8B-B14F-4D97-AF65-F5344CB8AC3E}">
-        <p14:creationId xmlns:p14="http://schemas.microsoft.com/office/powerpoint/2010/main" val="275677026"/>
+        <p14:creationId xmlns:p14="http://schemas.microsoft.com/office/powerpoint/2010/main" val="1085207909"/>
       </p:ext>
     </p:extLst>
   </p:cSld>
@@ -357,7 +357,6 @@
             <a:r>
               <a:rPr lang="en-US" dirty="0"/>
               <a:t>10 minutos antes: deck abierto en esta lámina, barajador de listas listo en otra pestaña y sobre el escritorio un libro, audífonos, un lápiz y una hoja. Graba desde el minuto 0 (Basico1-Martes_S07_2026-11-24 o Basico1-Jueves_S07_2026-11-26). 20:00: saluda con 안녕하세요! y pasa al quiz.
-Imagen sugerida: Plantilla de la casa: logo azul y sello del tigre (versión 2, sin marco)
 Fuente: S07_Guia_Profesor.md · C.15 #1 · C.2 (10 minutos antes)
 Lámina 1</a:t>
             </a:r>
@@ -447,7 +446,7 @@
             <a:r>
               <a:rPr lang="en-US" dirty="0"/>
               <a:t>20:10–20:12. ES: “En Corea, casi todas las casas tienen calefacción bajo el piso: viene del 온돌 tradicional, cuando el calor del fogón pasaba bajo piedras; hoy son tubos de agua caliente. Todavía hay quien duerme en un 요, que en la mañana se guarda; hoy la mayoría duerme en cama, pero en algunas casas de abuelos todavía no hay.” Frase ancla con 따라 하세요, 2 veces; luego “¿En sus casas se entra con zapatos?” (1–2 respuestas) y las estaciones: allá el 온돌 ya está prendido, en Chile y Argentina se viene el verano (México y España van al invierno). Opcional, 20 s: el 김장. Di “hay quien”, “hoy la mayoría”, nunca “los coreanos duermen en el suelo”.
-Imagen sugerida: Fotos con licencia libre: un piso con 온돌 y un 요 extendido en el suelo
+Imagen: incluida (dibujo de la casa).
 Fuente: S07_Guia_Profesor.md · C.15 #10 · A.7 · C.3 bloque 10–12
 Lámina 10</a:t>
             </a:r>
@@ -626,7 +625,7 @@
             <a:r>
               <a:rPr lang="en-US" dirty="0"/>
               <a:t>Mímicas con objetos reales. ES: “Adivinen qué hago.” Toma el libro y haz como que lees: 책을 읽어요. Ponte los audífonos: 음악을 들어요. Dibuja en la hoja: 그림을 그려요. 따라 하세요, cada frase 2 veces; la frase aparece con clic después de que adivinen.
-Imagen sugerida: 3 fotos o íconos: un libro, audífonos, un lápiz
+Imagen: incluida (dibujo de la casa).
 Fuente: S07_Guia_Profesor.md · C.15 #12 · C.3 bloque 12–16 · C.2 (objetos sobre el escritorio)
 Lámina 12</a:t>
             </a:r>
@@ -2674,7 +2673,6 @@
             <a:r>
               <a:rPr lang="en-US" dirty="0"/>
               <a:t>20:58. KO: 감사합니다! 화이팅! Los alumnos responden 안녕히 계세요! y tú, 안녕히 가세요! (convención de la S2). Termina la grabación a las 20:58.
-Imagen sugerida: Sello del tigre (versión 2, sin marco)
 Fuente: S07_Guia_Profesor.md · C.15 #30 · C.3 (despedida)
 Lámina 30</a:t>
             </a:r>
@@ -2853,7 +2851,7 @@
             <a:r>
               <a:rPr lang="en-US" dirty="0"/>
               <a:t>20:05–20:08. ES: “Hoy entramos a las piezas. Primero, la mía. Escuchen: si algo HAY, levanten el pulgar; si NO hay, la mano abierta” (reacciones de Zoom). KO, despacio, señalando el dibujo: 방이에요. 방에 침대가 있어요. 창문이 있어요. 침대 옆에 창문이 있어요. 책상이 있어요. 책상 위에 컴퓨터가 있어요. 책상 위에 사진이 있어요. 옷장이 있어요. 옷장 옆에 거울이 있어요. 그림이 있어요. 텔레비전은… 없어요! Después: “¿Qué no hay?” (el televisor).
-Imagen sugerida: Dibujo nuevo de la pieza de Kiran, sin texto: cama junto a la ventana · ventana · escritorio con computador encima · silla · foto sobre el escritorio · clóset con un espejo al lado · un dibujo (cuadro) · puerta · sin televisor
+Imagen: incluida (dibujo de la casa).
 Fuente: S07_Guia_Profesor.md · C.15 #5 · C.2 (contenido del dibujo) · C.3 bloque 5–10
 Lámina 5</a:t>
             </a:r>
@@ -3032,7 +3030,7 @@
             <a:r>
               <a:rPr lang="en-US" dirty="0"/>
               <a:t>Práctica controlada, 90 s. Señala cada objeto del dibujo y el grupo responde en coro; revela la frase con clic después del coro. Si alguien dice 안 있어요, corrige en coreano: 없어요.
-Imagen sugerida: El mismo dibujo de la lámina 5 con marcas sí / no: X gris solo sobre el televisor (nunca roja); el espejo sí está
+Imagen: incluida (dibujo de la casa).
 Fuente: S07_Guia_Profesor.md · C.15 #7 · C.3 bloque 5–10 (controlada)
 Lámina 7</a:t>
             </a:r>
@@ -4450,7 +4448,7 @@
         <p:spPr>
           <a:xfrm>
             <a:off x="548640" y="1325880"/>
-            <a:ext cx="11064240" cy="457200"/>
+            <a:ext cx="11091672" cy="457200"/>
           </a:xfrm>
           <a:prstGeom prst="rect">
             <a:avLst/>
@@ -4566,15 +4564,39 @@
           </a:p>
         </p:txBody>
       </p:sp>
-      <p:sp>
-        <p:nvSpPr>
-          <p:cNvPr id="6" name="Text 4"/>
+      <p:pic>
+        <p:nvPicPr>
+          <p:cNvPr id="6" name="col_img_0" descr="C:\Users\Chingu\AppData\Local\Temp\claude\C--Users-Chingu-Desktop-ACADEMIASEULWEB\d4111e1b-5523-44ea-97b2-b1a1d9545b9e\scratchpad\decks\cache\img_c3fc131e15c296f8.png"/>
+          <p:cNvPicPr>
+            <a:picLocks noChangeAspect="1"/>
+          </p:cNvPicPr>
+          <p:nvPr/>
+        </p:nvPicPr>
+        <p:blipFill>
+          <a:blip r:embed="rId3"/>
+          <a:stretch>
+            <a:fillRect/>
+          </a:stretch>
+        </p:blipFill>
+        <p:spPr>
+          <a:xfrm>
+            <a:off x="1973072" y="2651760"/>
+            <a:ext cx="2536952" cy="1153160"/>
+          </a:xfrm>
+          <a:prstGeom prst="rect">
+            <a:avLst/>
+          </a:prstGeom>
+        </p:spPr>
+      </p:pic>
+      <p:sp>
+        <p:nvSpPr>
+          <p:cNvPr id="7" name="Text 4"/>
           <p:cNvSpPr txBox="1"/>
           <p:nvPr/>
         </p:nvSpPr>
         <p:spPr>
           <a:xfrm>
-            <a:off x="777240" y="2651760"/>
+            <a:off x="777240" y="3896360"/>
             <a:ext cx="4928616" cy="914400"/>
           </a:xfrm>
           <a:prstGeom prst="rect">
@@ -4634,14 +4656,14 @@
       </p:sp>
       <p:sp>
         <p:nvSpPr>
-          <p:cNvPr id="7" name="lista"/>
+          <p:cNvPr id="8" name="lista"/>
           <p:cNvSpPr txBox="1"/>
           <p:nvPr/>
         </p:nvSpPr>
         <p:spPr>
           <a:xfrm>
-            <a:off x="731520" y="3657600"/>
-            <a:ext cx="5020056" cy="2377440"/>
+            <a:off x="731520" y="4902200"/>
+            <a:ext cx="5020056" cy="1132840"/>
           </a:xfrm>
           <a:prstGeom prst="rect">
             <a:avLst/>
@@ -4705,7 +4727,7 @@
       </p:sp>
       <p:sp>
         <p:nvSpPr>
-          <p:cNvPr id="8" name="col_1"/>
+          <p:cNvPr id="9" name="col_1"/>
           <p:cNvSpPr/>
           <p:nvPr/>
         </p:nvSpPr>
@@ -4732,7 +4754,7 @@
       </p:sp>
       <p:sp>
         <p:nvSpPr>
-          <p:cNvPr id="9" name="Text 7"/>
+          <p:cNvPr id="10" name="Text 7"/>
           <p:cNvSpPr txBox="1"/>
           <p:nvPr/>
         </p:nvSpPr>
@@ -4768,15 +4790,39 @@
           </a:p>
         </p:txBody>
       </p:sp>
-      <p:sp>
-        <p:nvSpPr>
-          <p:cNvPr id="10" name="Text 8"/>
+      <p:pic>
+        <p:nvPicPr>
+          <p:cNvPr id="11" name="col_img_1" descr="C:\Users\Chingu\AppData\Local\Temp\claude\C--Users-Chingu-Desktop-ACADEMIASEULWEB\d4111e1b-5523-44ea-97b2-b1a1d9545b9e\scratchpad\decks\cache\img_d894a4729b680b2b.png"/>
+          <p:cNvPicPr>
+            <a:picLocks noChangeAspect="1"/>
+          </p:cNvPicPr>
+          <p:nvPr/>
+        </p:nvPicPr>
+        <p:blipFill>
+          <a:blip r:embed="rId4"/>
+          <a:stretch>
+            <a:fillRect/>
+          </a:stretch>
+        </p:blipFill>
+        <p:spPr>
+          <a:xfrm>
+            <a:off x="7678928" y="2651760"/>
+            <a:ext cx="2536952" cy="1153160"/>
+          </a:xfrm>
+          <a:prstGeom prst="rect">
+            <a:avLst/>
+          </a:prstGeom>
+        </p:spPr>
+      </p:pic>
+      <p:sp>
+        <p:nvSpPr>
+          <p:cNvPr id="12" name="Text 8"/>
           <p:cNvSpPr txBox="1"/>
           <p:nvPr/>
         </p:nvSpPr>
         <p:spPr>
           <a:xfrm>
-            <a:off x="6483096" y="2651760"/>
+            <a:off x="6483096" y="3896360"/>
             <a:ext cx="4928616" cy="914400"/>
           </a:xfrm>
           <a:prstGeom prst="rect">
@@ -4819,14 +4865,14 @@
       </p:sp>
       <p:sp>
         <p:nvSpPr>
-          <p:cNvPr id="11" name="lista"/>
+          <p:cNvPr id="13" name="lista"/>
           <p:cNvSpPr txBox="1"/>
           <p:nvPr/>
         </p:nvSpPr>
         <p:spPr>
           <a:xfrm>
-            <a:off x="6437376" y="3657600"/>
-            <a:ext cx="5020056" cy="2377440"/>
+            <a:off x="6437376" y="4902200"/>
+            <a:ext cx="5020056" cy="1132840"/>
           </a:xfrm>
           <a:prstGeom prst="rect">
             <a:avLst/>
@@ -5519,7 +5565,7 @@
         <p:spPr>
           <a:xfrm>
             <a:off x="548640" y="1325880"/>
-            <a:ext cx="11064240" cy="457200"/>
+            <a:ext cx="11091672" cy="457200"/>
           </a:xfrm>
           <a:prstGeom prst="rect">
             <a:avLst/>
@@ -5582,16 +5628,40 @@
           </a:effectLst>
         </p:spPr>
       </p:sp>
-      <p:sp>
-        <p:nvSpPr>
-          <p:cNvPr id="5" name="Text 3"/>
+      <p:pic>
+        <p:nvPicPr>
+          <p:cNvPr id="5" name="dibujo_0" descr="C:\Users\Chingu\AppData\Local\Temp\claude\C--Users-Chingu-Desktop-ACADEMIASEULWEB\d4111e1b-5523-44ea-97b2-b1a1d9545b9e\scratchpad\decks\cache\img_1b36426dcaf1178d.png"/>
+          <p:cNvPicPr>
+            <a:picLocks noChangeAspect="1"/>
+          </p:cNvPicPr>
+          <p:nvPr/>
+        </p:nvPicPr>
+        <p:blipFill>
+          <a:blip r:embed="rId5"/>
+          <a:stretch>
+            <a:fillRect/>
+          </a:stretch>
+        </p:blipFill>
+        <p:spPr>
+          <a:xfrm>
+            <a:off x="1289609" y="1984248"/>
+            <a:ext cx="2062886" cy="2062886"/>
+          </a:xfrm>
+          <a:prstGeom prst="rect">
+            <a:avLst/>
+          </a:prstGeom>
+        </p:spPr>
+      </p:pic>
+      <p:sp>
+        <p:nvSpPr>
+          <p:cNvPr id="6" name="Text 3"/>
           <p:cNvSpPr txBox="1"/>
           <p:nvPr/>
         </p:nvSpPr>
         <p:spPr>
           <a:xfrm>
-            <a:off x="548640" y="2499970"/>
-            <a:ext cx="3544824" cy="1461211"/>
+            <a:off x="548640" y="4065422"/>
+            <a:ext cx="3544824" cy="859536"/>
           </a:xfrm>
           <a:prstGeom prst="rect">
             <a:avLst/>
@@ -5609,7 +5679,7 @@
               <a:buNone/>
             </a:pPr>
             <a:r>
-              <a:rPr lang="ko-KR" altLang="en-US" sz="4400" b="1" dirty="0">
+              <a:rPr lang="ko-KR" altLang="en-US" sz="3700" b="1" dirty="0">
                 <a:solidFill>
                   <a:srgbClr val="4236F6"/>
                 </a:solidFill>
@@ -5619,19 +5689,19 @@
               </a:rPr>
               <a:t>책을 읽어요</a:t>
             </a:r>
-            <a:endParaRPr lang="en-US" sz="4400" dirty="0"/>
-          </a:p>
-        </p:txBody>
-      </p:sp>
-      <p:sp>
-        <p:nvSpPr>
-          <p:cNvPr id="6" name="Text 4"/>
+            <a:endParaRPr lang="en-US" sz="3700" dirty="0"/>
+          </a:p>
+        </p:txBody>
+      </p:sp>
+      <p:sp>
+        <p:nvSpPr>
+          <p:cNvPr id="7" name="Text 4"/>
           <p:cNvSpPr txBox="1"/>
           <p:nvPr/>
         </p:nvSpPr>
         <p:spPr>
           <a:xfrm>
-            <a:off x="548640" y="3961181"/>
+            <a:off x="548640" y="4924958"/>
             <a:ext cx="3544824" cy="274320"/>
           </a:xfrm>
           <a:prstGeom prst="rect">
@@ -5731,14 +5801,14 @@
       </p:sp>
       <p:sp>
         <p:nvSpPr>
-          <p:cNvPr id="7" name="Text 5"/>
+          <p:cNvPr id="8" name="Text 5"/>
           <p:cNvSpPr txBox="1"/>
           <p:nvPr/>
         </p:nvSpPr>
         <p:spPr>
           <a:xfrm>
-            <a:off x="621792" y="4235501"/>
-            <a:ext cx="3398520" cy="1525219"/>
+            <a:off x="621792" y="5199278"/>
+            <a:ext cx="3398520" cy="899770"/>
           </a:xfrm>
           <a:prstGeom prst="rect">
             <a:avLst/>
@@ -5769,7 +5839,7 @@
       </p:sp>
       <p:pic>
         <p:nvPicPr>
-          <p:cNvPr id="8" name="Media 0">
+          <p:cNvPr id="9" name="Media 0">
             <a:hlinkClick r:id="" action="ppaction://media"/>
           </p:cNvPr>
           <p:cNvPicPr>
@@ -5785,15 +5855,15 @@
           </p:nvPr>
         </p:nvPicPr>
         <p:blipFill>
-          <a:blip r:embed="rId5"/>
+          <a:blip r:embed="rId6"/>
           <a:stretch>
             <a:fillRect/>
           </a:stretch>
         </p:blipFill>
         <p:spPr>
           <a:xfrm>
-            <a:off x="3654552" y="5751576"/>
-            <a:ext cx="329184" cy="329184"/>
+            <a:off x="3691128" y="1947672"/>
+            <a:ext cx="310896" cy="310896"/>
           </a:xfrm>
           <a:prstGeom prst="rect">
             <a:avLst/>
@@ -5802,7 +5872,7 @@
       </p:pic>
       <p:sp>
         <p:nvSpPr>
-          <p:cNvPr id="9" name="card_1"/>
+          <p:cNvPr id="10" name="card_1"/>
           <p:cNvSpPr/>
           <p:nvPr/>
         </p:nvSpPr>
@@ -5834,16 +5904,40 @@
           </a:effectLst>
         </p:spPr>
       </p:sp>
-      <p:sp>
-        <p:nvSpPr>
-          <p:cNvPr id="10" name="Text 7"/>
+      <p:pic>
+        <p:nvPicPr>
+          <p:cNvPr id="11" name="dibujo_1" descr="C:\Users\Chingu\AppData\Local\Temp\claude\C--Users-Chingu-Desktop-ACADEMIASEULWEB\d4111e1b-5523-44ea-97b2-b1a1d9545b9e\scratchpad\decks\cache\img_6f48d03778d4d640.png"/>
+          <p:cNvPicPr>
+            <a:picLocks noChangeAspect="1"/>
+          </p:cNvPicPr>
+          <p:nvPr/>
+        </p:nvPicPr>
+        <p:blipFill>
+          <a:blip r:embed="rId7"/>
+          <a:stretch>
+            <a:fillRect/>
+          </a:stretch>
+        </p:blipFill>
+        <p:spPr>
+          <a:xfrm>
+            <a:off x="5063033" y="1984248"/>
+            <a:ext cx="2062886" cy="2062886"/>
+          </a:xfrm>
+          <a:prstGeom prst="rect">
+            <a:avLst/>
+          </a:prstGeom>
+        </p:spPr>
+      </p:pic>
+      <p:sp>
+        <p:nvSpPr>
+          <p:cNvPr id="12" name="Text 7"/>
           <p:cNvSpPr txBox="1"/>
           <p:nvPr/>
         </p:nvSpPr>
         <p:spPr>
           <a:xfrm>
-            <a:off x="4322064" y="2499970"/>
-            <a:ext cx="3544824" cy="1461211"/>
+            <a:off x="4322064" y="4065422"/>
+            <a:ext cx="3544824" cy="859536"/>
           </a:xfrm>
           <a:prstGeom prst="rect">
             <a:avLst/>
@@ -5861,7 +5955,7 @@
               <a:buNone/>
             </a:pPr>
             <a:r>
-              <a:rPr lang="ko-KR" altLang="en-US" sz="4600" b="1" dirty="0">
+              <a:rPr lang="ko-KR" altLang="en-US" sz="3700" b="1" dirty="0">
                 <a:solidFill>
                   <a:srgbClr val="4236F6"/>
                 </a:solidFill>
@@ -5869,38 +5963,21 @@
                 <a:ea typeface="Malgun Gothic" pitchFamily="34" charset="-122"/>
                 <a:cs typeface="Malgun Gothic" pitchFamily="34" charset="-120"/>
               </a:rPr>
-              <a:t>음악을</a:t>
-            </a:r>
-            <a:endParaRPr lang="en-US" sz="4600" dirty="0"/>
-          </a:p>
-          <a:p>
-            <a:pPr marL="0" indent="0" algn="ctr" eaLnBrk="1">
-              <a:buNone/>
-            </a:pPr>
-            <a:r>
-              <a:rPr lang="ko-KR" altLang="en-US" sz="4600" b="1" dirty="0">
-                <a:solidFill>
-                  <a:srgbClr val="4236F6"/>
-                </a:solidFill>
-                <a:latin typeface="Malgun Gothic" pitchFamily="34" charset="0"/>
-                <a:ea typeface="Malgun Gothic" pitchFamily="34" charset="-122"/>
-                <a:cs typeface="Malgun Gothic" pitchFamily="34" charset="-120"/>
-              </a:rPr>
-              <a:t>들어요</a:t>
-            </a:r>
-            <a:endParaRPr lang="en-US" sz="4600" dirty="0"/>
-          </a:p>
-        </p:txBody>
-      </p:sp>
-      <p:sp>
-        <p:nvSpPr>
-          <p:cNvPr id="11" name="Text 8"/>
+              <a:t>음악을 들어요</a:t>
+            </a:r>
+            <a:endParaRPr lang="en-US" sz="3700" dirty="0"/>
+          </a:p>
+        </p:txBody>
+      </p:sp>
+      <p:sp>
+        <p:nvSpPr>
+          <p:cNvPr id="13" name="Text 8"/>
           <p:cNvSpPr txBox="1"/>
           <p:nvPr/>
         </p:nvSpPr>
         <p:spPr>
           <a:xfrm>
-            <a:off x="4322064" y="3961181"/>
+            <a:off x="4322064" y="4924958"/>
             <a:ext cx="3544824" cy="274320"/>
           </a:xfrm>
           <a:prstGeom prst="rect">
@@ -5962,14 +6039,14 @@
       </p:sp>
       <p:sp>
         <p:nvSpPr>
-          <p:cNvPr id="12" name="Text 9"/>
+          <p:cNvPr id="14" name="Text 9"/>
           <p:cNvSpPr txBox="1"/>
           <p:nvPr/>
         </p:nvSpPr>
         <p:spPr>
           <a:xfrm>
-            <a:off x="4395216" y="4235501"/>
-            <a:ext cx="3398520" cy="1525219"/>
+            <a:off x="4395216" y="5199278"/>
+            <a:ext cx="3398520" cy="899770"/>
           </a:xfrm>
           <a:prstGeom prst="rect">
             <a:avLst/>
@@ -6000,7 +6077,7 @@
       </p:sp>
       <p:sp>
         <p:nvSpPr>
-          <p:cNvPr id="13" name="card_2"/>
+          <p:cNvPr id="15" name="card_2"/>
           <p:cNvSpPr/>
           <p:nvPr/>
         </p:nvSpPr>
@@ -6032,16 +6109,40 @@
           </a:effectLst>
         </p:spPr>
       </p:sp>
-      <p:sp>
-        <p:nvSpPr>
-          <p:cNvPr id="14" name="Text 11"/>
+      <p:pic>
+        <p:nvPicPr>
+          <p:cNvPr id="16" name="dibujo_2" descr="C:\Users\Chingu\AppData\Local\Temp\claude\C--Users-Chingu-Desktop-ACADEMIASEULWEB\d4111e1b-5523-44ea-97b2-b1a1d9545b9e\scratchpad\decks\cache\img_871dd5ceeaf42c37.png"/>
+          <p:cNvPicPr>
+            <a:picLocks noChangeAspect="1"/>
+          </p:cNvPicPr>
+          <p:nvPr/>
+        </p:nvPicPr>
+        <p:blipFill>
+          <a:blip r:embed="rId8"/>
+          <a:stretch>
+            <a:fillRect/>
+          </a:stretch>
+        </p:blipFill>
+        <p:spPr>
+          <a:xfrm>
+            <a:off x="8836457" y="1984248"/>
+            <a:ext cx="2062886" cy="2062886"/>
+          </a:xfrm>
+          <a:prstGeom prst="rect">
+            <a:avLst/>
+          </a:prstGeom>
+        </p:spPr>
+      </p:pic>
+      <p:sp>
+        <p:nvSpPr>
+          <p:cNvPr id="17" name="Text 11"/>
           <p:cNvSpPr txBox="1"/>
           <p:nvPr/>
         </p:nvSpPr>
         <p:spPr>
           <a:xfrm>
-            <a:off x="8095488" y="2499970"/>
-            <a:ext cx="3544824" cy="1461211"/>
+            <a:off x="8095488" y="4065422"/>
+            <a:ext cx="3544824" cy="859536"/>
           </a:xfrm>
           <a:prstGeom prst="rect">
             <a:avLst/>
@@ -6059,7 +6160,7 @@
               <a:buNone/>
             </a:pPr>
             <a:r>
-              <a:rPr lang="ko-KR" altLang="en-US" sz="4600" b="1" dirty="0">
+              <a:rPr lang="ko-KR" altLang="en-US" sz="3700" b="1" dirty="0">
                 <a:solidFill>
                   <a:srgbClr val="4236F6"/>
                 </a:solidFill>
@@ -6067,38 +6168,21 @@
                 <a:ea typeface="Malgun Gothic" pitchFamily="34" charset="-122"/>
                 <a:cs typeface="Malgun Gothic" pitchFamily="34" charset="-120"/>
               </a:rPr>
-              <a:t>그림을</a:t>
-            </a:r>
-            <a:endParaRPr lang="en-US" sz="4600" dirty="0"/>
-          </a:p>
-          <a:p>
-            <a:pPr marL="0" indent="0" algn="ctr" eaLnBrk="1">
-              <a:buNone/>
-            </a:pPr>
-            <a:r>
-              <a:rPr lang="ko-KR" altLang="en-US" sz="4600" b="1" dirty="0">
-                <a:solidFill>
-                  <a:srgbClr val="4236F6"/>
-                </a:solidFill>
-                <a:latin typeface="Malgun Gothic" pitchFamily="34" charset="0"/>
-                <a:ea typeface="Malgun Gothic" pitchFamily="34" charset="-122"/>
-                <a:cs typeface="Malgun Gothic" pitchFamily="34" charset="-120"/>
-              </a:rPr>
-              <a:t>그려요</a:t>
-            </a:r>
-            <a:endParaRPr lang="en-US" sz="4600" dirty="0"/>
-          </a:p>
-        </p:txBody>
-      </p:sp>
-      <p:sp>
-        <p:nvSpPr>
-          <p:cNvPr id="15" name="Text 12"/>
+              <a:t>그림을 그려요</a:t>
+            </a:r>
+            <a:endParaRPr lang="en-US" sz="3700" dirty="0"/>
+          </a:p>
+        </p:txBody>
+      </p:sp>
+      <p:sp>
+        <p:nvSpPr>
+          <p:cNvPr id="18" name="Text 12"/>
           <p:cNvSpPr txBox="1"/>
           <p:nvPr/>
         </p:nvSpPr>
         <p:spPr>
           <a:xfrm>
-            <a:off x="8095488" y="3961181"/>
+            <a:off x="8095488" y="4924958"/>
             <a:ext cx="3544824" cy="274320"/>
           </a:xfrm>
           <a:prstGeom prst="rect">
@@ -6160,14 +6244,14 @@
       </p:sp>
       <p:sp>
         <p:nvSpPr>
-          <p:cNvPr id="16" name="Text 13"/>
+          <p:cNvPr id="19" name="Text 13"/>
           <p:cNvSpPr txBox="1"/>
           <p:nvPr/>
         </p:nvSpPr>
         <p:spPr>
           <a:xfrm>
-            <a:off x="8168640" y="4235501"/>
-            <a:ext cx="3398520" cy="1525219"/>
+            <a:off x="8168640" y="5199278"/>
+            <a:ext cx="3398520" cy="899770"/>
           </a:xfrm>
           <a:prstGeom prst="rect">
             <a:avLst/>
@@ -6394,7 +6478,7 @@
         <p:spPr>
           <a:xfrm>
             <a:off x="548640" y="1325880"/>
-            <a:ext cx="11064240" cy="457200"/>
+            <a:ext cx="11091672" cy="457200"/>
           </a:xfrm>
           <a:prstGeom prst="rect">
             <a:avLst/>
@@ -7967,7 +8051,7 @@
         <p:spPr>
           <a:xfrm>
             <a:off x="548640" y="1325880"/>
-            <a:ext cx="11064240" cy="548640"/>
+            <a:ext cx="11091672" cy="548640"/>
           </a:xfrm>
           <a:prstGeom prst="rect">
             <a:avLst/>
@@ -8410,7 +8494,7 @@
               <a:buNone/>
             </a:pPr>
             <a:r>
-              <a:rPr lang="ko-KR" altLang="en-US" sz="2400" dirty="0">
+              <a:rPr lang="ko-KR" altLang="en-US" sz="2300" dirty="0">
                 <a:solidFill>
                   <a:srgbClr val="14142B"/>
                 </a:solidFill>
@@ -8421,7 +8505,7 @@
               <a:t>그리다 </a:t>
             </a:r>
             <a:r>
-              <a:rPr lang="en-US" sz="2400" dirty="0">
+              <a:rPr lang="en-US" sz="2300" dirty="0">
                 <a:solidFill>
                   <a:srgbClr val="14142B"/>
                 </a:solidFill>
@@ -8429,7 +8513,7 @@
               <a:t>(dibujar): </a:t>
             </a:r>
             <a:r>
-              <a:rPr lang="ko-KR" altLang="en-US" sz="2400" dirty="0">
+              <a:rPr lang="ko-KR" altLang="en-US" sz="2300" dirty="0">
                 <a:solidFill>
                   <a:srgbClr val="14142B"/>
                 </a:solidFill>
@@ -8440,7 +8524,7 @@
               <a:t>그리 </a:t>
             </a:r>
             <a:r>
-              <a:rPr lang="en-US" sz="2400" dirty="0">
+              <a:rPr lang="en-US" sz="2300" dirty="0">
                 <a:solidFill>
                   <a:srgbClr val="14142B"/>
                 </a:solidFill>
@@ -8448,7 +8532,7 @@
               <a:t>+ </a:t>
             </a:r>
             <a:r>
-              <a:rPr lang="ko-KR" altLang="en-US" sz="2400" dirty="0">
+              <a:rPr lang="ko-KR" altLang="en-US" sz="2300" dirty="0">
                 <a:solidFill>
                   <a:srgbClr val="14142B"/>
                 </a:solidFill>
@@ -8458,7 +8542,7 @@
               </a:rPr>
               <a:t>어요</a:t>
             </a:r>
-            <a:endParaRPr lang="en-US" sz="2400" dirty="0"/>
+            <a:endParaRPr lang="en-US" sz="2300" dirty="0"/>
           </a:p>
         </p:txBody>
       </p:sp>
@@ -8685,7 +8769,7 @@
               <a:buNone/>
             </a:pPr>
             <a:r>
-              <a:rPr lang="ko-KR" altLang="en-US" sz="2400" dirty="0">
+              <a:rPr lang="ko-KR" altLang="en-US" sz="2200" dirty="0">
                 <a:solidFill>
                   <a:srgbClr val="14142B"/>
                 </a:solidFill>
@@ -8696,7 +8780,7 @@
               <a:t>배우다 </a:t>
             </a:r>
             <a:r>
-              <a:rPr lang="en-US" sz="2400" dirty="0">
+              <a:rPr lang="en-US" sz="2200" dirty="0">
                 <a:solidFill>
                   <a:srgbClr val="14142B"/>
                 </a:solidFill>
@@ -8704,7 +8788,7 @@
               <a:t>(aprender): </a:t>
             </a:r>
             <a:r>
-              <a:rPr lang="ko-KR" altLang="en-US" sz="2400" dirty="0">
+              <a:rPr lang="ko-KR" altLang="en-US" sz="2200" dirty="0">
                 <a:solidFill>
                   <a:srgbClr val="14142B"/>
                 </a:solidFill>
@@ -8715,7 +8799,7 @@
               <a:t>배우 </a:t>
             </a:r>
             <a:r>
-              <a:rPr lang="en-US" sz="2400" dirty="0">
+              <a:rPr lang="en-US" sz="2200" dirty="0">
                 <a:solidFill>
                   <a:srgbClr val="14142B"/>
                 </a:solidFill>
@@ -8723,7 +8807,7 @@
               <a:t>+ </a:t>
             </a:r>
             <a:r>
-              <a:rPr lang="ko-KR" altLang="en-US" sz="2400" dirty="0">
+              <a:rPr lang="ko-KR" altLang="en-US" sz="2200" dirty="0">
                 <a:solidFill>
                   <a:srgbClr val="14142B"/>
                 </a:solidFill>
@@ -8733,7 +8817,7 @@
               </a:rPr>
               <a:t>어요</a:t>
             </a:r>
-            <a:endParaRPr lang="en-US" sz="2400" dirty="0"/>
+            <a:endParaRPr lang="en-US" sz="2200" dirty="0"/>
           </a:p>
         </p:txBody>
       </p:sp>
@@ -10154,7 +10238,7 @@
         <p:spPr>
           <a:xfrm>
             <a:off x="548640" y="1325880"/>
-            <a:ext cx="11064240" cy="457200"/>
+            <a:ext cx="11091672" cy="457200"/>
           </a:xfrm>
           <a:prstGeom prst="rect">
             <a:avLst/>
@@ -10950,7 +11034,7 @@
         <p:spPr>
           <a:xfrm>
             <a:off x="548640" y="1325880"/>
-            <a:ext cx="11064240" cy="548640"/>
+            <a:ext cx="11091672" cy="548640"/>
           </a:xfrm>
           <a:prstGeom prst="rect">
             <a:avLst/>
@@ -12638,7 +12722,7 @@
         <p:spPr>
           <a:xfrm>
             <a:off x="548640" y="1325880"/>
-            <a:ext cx="11064240" cy="548640"/>
+            <a:ext cx="11091672" cy="548640"/>
           </a:xfrm>
           <a:prstGeom prst="rect">
             <a:avLst/>
@@ -14334,7 +14418,7 @@
         <p:spPr>
           <a:xfrm>
             <a:off x="548640" y="1325880"/>
-            <a:ext cx="11064240" cy="548640"/>
+            <a:ext cx="11091672" cy="548640"/>
           </a:xfrm>
           <a:prstGeom prst="rect">
             <a:avLst/>
@@ -15945,7 +16029,7 @@
         <p:spPr>
           <a:xfrm>
             <a:off x="548640" y="1325880"/>
-            <a:ext cx="11064240" cy="548640"/>
+            <a:ext cx="11091672" cy="548640"/>
           </a:xfrm>
           <a:prstGeom prst="rect">
             <a:avLst/>
@@ -17954,7 +18038,7 @@
         <p:spPr>
           <a:xfrm>
             <a:off x="548640" y="1325880"/>
-            <a:ext cx="11064240" cy="457200"/>
+            <a:ext cx="11091672" cy="457200"/>
           </a:xfrm>
           <a:prstGeom prst="rect">
             <a:avLst/>
@@ -17992,7 +18076,7 @@
           <p:nvPr>
             <p:extLst>
               <p:ext uri="{D42A27DB-BD31-4B8C-83A1-F6EECF244321}">
-                <p14:modId xmlns:p14="http://schemas.microsoft.com/office/powerpoint/2010/main" val="304523933"/>
+                <p14:modId xmlns:p14="http://schemas.microsoft.com/office/powerpoint/2010/main" val="4019295845"/>
               </p:ext>
             </p:extLst>
           </p:nvPr>
@@ -19562,7 +19646,7 @@
         <p:spPr>
           <a:xfrm>
             <a:off x="548640" y="1325880"/>
-            <a:ext cx="11064240" cy="457200"/>
+            <a:ext cx="11091672" cy="457200"/>
           </a:xfrm>
           <a:prstGeom prst="rect">
             <a:avLst/>
@@ -19600,7 +19684,7 @@
           <p:nvPr>
             <p:extLst>
               <p:ext uri="{D42A27DB-BD31-4B8C-83A1-F6EECF244321}">
-                <p14:modId xmlns:p14="http://schemas.microsoft.com/office/powerpoint/2010/main" val="890447707"/>
+                <p14:modId xmlns:p14="http://schemas.microsoft.com/office/powerpoint/2010/main" val="2655591259"/>
               </p:ext>
             </p:extLst>
           </p:nvPr>
@@ -21298,7 +21382,7 @@
         <p:spPr>
           <a:xfrm>
             <a:off x="548640" y="1325880"/>
-            <a:ext cx="11064240" cy="548640"/>
+            <a:ext cx="11091672" cy="548640"/>
           </a:xfrm>
           <a:prstGeom prst="rect">
             <a:avLst/>
@@ -21403,7 +21487,7 @@
         </p:nvSpPr>
         <p:spPr>
           <a:xfrm>
-            <a:off x="548640" y="2171700"/>
+            <a:off x="548640" y="2574950"/>
             <a:ext cx="457200" cy="457200"/>
           </a:xfrm>
           <a:prstGeom prst="ellipse">
@@ -21428,7 +21512,7 @@
         </p:nvSpPr>
         <p:spPr>
           <a:xfrm>
-            <a:off x="548640" y="2171700"/>
+            <a:off x="548640" y="2574950"/>
             <a:ext cx="457200" cy="457200"/>
           </a:xfrm>
           <a:prstGeom prst="rect">
@@ -21466,7 +21550,7 @@
         </p:nvSpPr>
         <p:spPr>
           <a:xfrm>
-            <a:off x="1188720" y="1965960"/>
+            <a:off x="1188720" y="2369210"/>
             <a:ext cx="5285232" cy="868680"/>
           </a:xfrm>
           <a:prstGeom prst="rect">
@@ -21515,7 +21599,7 @@
         </p:nvSpPr>
         <p:spPr>
           <a:xfrm>
-            <a:off x="6702552" y="2002536"/>
+            <a:off x="6702552" y="2405786"/>
             <a:ext cx="4937760" cy="795528"/>
           </a:xfrm>
           <a:prstGeom prst="roundRect">
@@ -21542,7 +21626,7 @@
         </p:nvSpPr>
         <p:spPr>
           <a:xfrm>
-            <a:off x="6793992" y="2002536"/>
+            <a:off x="6793992" y="2405786"/>
             <a:ext cx="4754880" cy="795528"/>
           </a:xfrm>
           <a:prstGeom prst="rect">
@@ -21580,7 +21664,7 @@
         </p:nvSpPr>
         <p:spPr>
           <a:xfrm>
-            <a:off x="548640" y="3168396"/>
+            <a:off x="548640" y="3571646"/>
             <a:ext cx="457200" cy="457200"/>
           </a:xfrm>
           <a:prstGeom prst="ellipse">
@@ -21605,7 +21689,7 @@
         </p:nvSpPr>
         <p:spPr>
           <a:xfrm>
-            <a:off x="548640" y="3168396"/>
+            <a:off x="548640" y="3571646"/>
             <a:ext cx="457200" cy="457200"/>
           </a:xfrm>
           <a:prstGeom prst="rect">
@@ -21643,7 +21727,7 @@
         </p:nvSpPr>
         <p:spPr>
           <a:xfrm>
-            <a:off x="1188720" y="2962656"/>
+            <a:off x="1188720" y="3365906"/>
             <a:ext cx="5285232" cy="868680"/>
           </a:xfrm>
           <a:prstGeom prst="rect">
@@ -21692,7 +21776,7 @@
         </p:nvSpPr>
         <p:spPr>
           <a:xfrm>
-            <a:off x="6702552" y="2999232"/>
+            <a:off x="6702552" y="3402482"/>
             <a:ext cx="4937760" cy="795528"/>
           </a:xfrm>
           <a:prstGeom prst="roundRect">
@@ -21719,7 +21803,7 @@
         </p:nvSpPr>
         <p:spPr>
           <a:xfrm>
-            <a:off x="6793992" y="2999232"/>
+            <a:off x="6793992" y="3402482"/>
             <a:ext cx="4754880" cy="795528"/>
           </a:xfrm>
           <a:prstGeom prst="rect">
@@ -21757,7 +21841,7 @@
         </p:nvSpPr>
         <p:spPr>
           <a:xfrm>
-            <a:off x="548640" y="4165092"/>
+            <a:off x="548640" y="4568342"/>
             <a:ext cx="457200" cy="457200"/>
           </a:xfrm>
           <a:prstGeom prst="ellipse">
@@ -21782,7 +21866,7 @@
         </p:nvSpPr>
         <p:spPr>
           <a:xfrm>
-            <a:off x="548640" y="4165092"/>
+            <a:off x="548640" y="4568342"/>
             <a:ext cx="457200" cy="457200"/>
           </a:xfrm>
           <a:prstGeom prst="rect">
@@ -21820,7 +21904,7 @@
         </p:nvSpPr>
         <p:spPr>
           <a:xfrm>
-            <a:off x="1188720" y="3959352"/>
+            <a:off x="1188720" y="4362602"/>
             <a:ext cx="5285232" cy="868680"/>
           </a:xfrm>
           <a:prstGeom prst="rect">
@@ -21869,7 +21953,7 @@
         </p:nvSpPr>
         <p:spPr>
           <a:xfrm>
-            <a:off x="6702552" y="3995928"/>
+            <a:off x="6702552" y="4399178"/>
             <a:ext cx="4937760" cy="795528"/>
           </a:xfrm>
           <a:prstGeom prst="roundRect">
@@ -21896,7 +21980,7 @@
         </p:nvSpPr>
         <p:spPr>
           <a:xfrm>
-            <a:off x="6793992" y="3995928"/>
+            <a:off x="6793992" y="4399178"/>
             <a:ext cx="4754880" cy="795528"/>
           </a:xfrm>
           <a:prstGeom prst="rect">
@@ -23746,14 +23830,14 @@
               <a:buChar char="•"/>
             </a:pPr>
             <a:r>
-              <a:rPr lang="en-US" sz="2400" dirty="0">
+              <a:rPr lang="en-US" sz="2800" dirty="0">
                 <a:solidFill>
                   <a:srgbClr val="14142B"/>
                 </a:solidFill>
               </a:rPr>
               <a:t>✗ ______________ → ✓ ______________</a:t>
             </a:r>
-            <a:endParaRPr lang="en-US" sz="2400" dirty="0"/>
+            <a:endParaRPr lang="en-US" sz="2800" dirty="0"/>
           </a:p>
           <a:p>
             <a:pPr marL="228600" indent="-228600" eaLnBrk="1">
@@ -23764,14 +23848,14 @@
               <a:buChar char="•"/>
             </a:pPr>
             <a:r>
-              <a:rPr lang="en-US" sz="2400" dirty="0">
+              <a:rPr lang="en-US" sz="2800" dirty="0">
                 <a:solidFill>
                   <a:srgbClr val="14142B"/>
                 </a:solidFill>
               </a:rPr>
               <a:t>✗ ______________ → ✓ ______________</a:t>
             </a:r>
-            <a:endParaRPr lang="en-US" sz="2400" dirty="0"/>
+            <a:endParaRPr lang="en-US" sz="2800" dirty="0"/>
           </a:p>
           <a:p>
             <a:pPr marL="228600" indent="-228600" eaLnBrk="1">
@@ -23782,14 +23866,14 @@
               <a:buChar char="•"/>
             </a:pPr>
             <a:r>
-              <a:rPr lang="en-US" sz="2400" dirty="0">
+              <a:rPr lang="en-US" sz="2800" dirty="0">
                 <a:solidFill>
                   <a:srgbClr val="14142B"/>
                 </a:solidFill>
               </a:rPr>
               <a:t>✗ ______________ → ✓ ______________</a:t>
             </a:r>
-            <a:endParaRPr lang="en-US" sz="2400" dirty="0"/>
+            <a:endParaRPr lang="en-US" sz="2800" dirty="0"/>
           </a:p>
         </p:txBody>
       </p:sp>
@@ -24007,7 +24091,7 @@
               <a:buChar char="•"/>
             </a:pPr>
             <a:r>
-              <a:rPr lang="ko-KR" altLang="en-US" sz="2400" dirty="0">
+              <a:rPr lang="ko-KR" altLang="en-US" sz="2800" dirty="0">
                 <a:solidFill>
                   <a:srgbClr val="14142B"/>
                 </a:solidFill>
@@ -24018,14 +24102,14 @@
               <a:t>방에 침대가 있어요</a:t>
             </a:r>
             <a:r>
-              <a:rPr lang="en-US" sz="2400" dirty="0">
+              <a:rPr lang="en-US" sz="2800" dirty="0">
                 <a:solidFill>
                   <a:srgbClr val="14142B"/>
                 </a:solidFill>
               </a:rPr>
               <a:t>. — En la pieza hay una cama.</a:t>
             </a:r>
-            <a:endParaRPr lang="en-US" sz="2400" dirty="0"/>
+            <a:endParaRPr lang="en-US" sz="2800" dirty="0"/>
           </a:p>
           <a:p>
             <a:pPr marL="228600" indent="-228600" eaLnBrk="1">
@@ -24036,7 +24120,7 @@
               <a:buChar char="•"/>
             </a:pPr>
             <a:r>
-              <a:rPr lang="ko-KR" altLang="en-US" sz="2400" dirty="0">
+              <a:rPr lang="ko-KR" altLang="en-US" sz="2800" dirty="0">
                 <a:solidFill>
                   <a:srgbClr val="14142B"/>
                 </a:solidFill>
@@ -24047,14 +24131,14 @@
               <a:t>책을 읽어요</a:t>
             </a:r>
             <a:r>
-              <a:rPr lang="en-US" sz="2400" dirty="0">
+              <a:rPr lang="en-US" sz="2800" dirty="0">
                 <a:solidFill>
                   <a:srgbClr val="14142B"/>
                 </a:solidFill>
               </a:rPr>
               <a:t>. — Leo un libro.</a:t>
             </a:r>
-            <a:endParaRPr lang="en-US" sz="2400" dirty="0"/>
+            <a:endParaRPr lang="en-US" sz="2800" dirty="0"/>
           </a:p>
           <a:p>
             <a:pPr marL="228600" indent="-228600" eaLnBrk="1">
@@ -24065,7 +24149,7 @@
               <a:buChar char="•"/>
             </a:pPr>
             <a:r>
-              <a:rPr lang="ko-KR" altLang="en-US" sz="2400" dirty="0">
+              <a:rPr lang="ko-KR" altLang="en-US" sz="2800" dirty="0">
                 <a:solidFill>
                   <a:srgbClr val="14142B"/>
                 </a:solidFill>
@@ -24076,14 +24160,14 @@
               <a:t>김치를 좋아해요</a:t>
             </a:r>
             <a:r>
-              <a:rPr lang="en-US" sz="2400" dirty="0">
+              <a:rPr lang="en-US" sz="2800" dirty="0">
                 <a:solidFill>
                   <a:srgbClr val="14142B"/>
                 </a:solidFill>
               </a:rPr>
               <a:t>. — Me gusta el kimchi.</a:t>
             </a:r>
-            <a:endParaRPr lang="en-US" sz="2400" dirty="0"/>
+            <a:endParaRPr lang="en-US" sz="2800" dirty="0"/>
           </a:p>
         </p:txBody>
       </p:sp>
@@ -24332,7 +24416,7 @@
         <p:spPr>
           <a:xfrm>
             <a:off x="548640" y="1325880"/>
-            <a:ext cx="11064240" cy="457200"/>
+            <a:ext cx="11091672" cy="457200"/>
           </a:xfrm>
           <a:prstGeom prst="rect">
             <a:avLst/>
@@ -24457,7 +24541,7 @@
           <p:nvPr>
             <p:extLst>
               <p:ext uri="{D42A27DB-BD31-4B8C-83A1-F6EECF244321}">
-                <p14:modId xmlns:p14="http://schemas.microsoft.com/office/powerpoint/2010/main" val="3285170007"/>
+                <p14:modId xmlns:p14="http://schemas.microsoft.com/office/powerpoint/2010/main" val="1438645504"/>
               </p:ext>
             </p:extLst>
           </p:nvPr>
@@ -26385,7 +26469,7 @@
                 <a:ea typeface="Malgun Gothic" pitchFamily="34" charset="-122"/>
                 <a:cs typeface="Malgun Gothic" pitchFamily="34" charset="-120"/>
               </a:rPr>
-              <a:t>Ejemplo: 우리 가족은 네 명이에요</a:t>
+              <a:t>Ejemplo: 우리 가족은 네 명이에요</a:t>
             </a:r>
             <a:r>
               <a:rPr lang="en-US" sz="2000" dirty="0">
@@ -26654,7 +26738,7 @@
         <p:spPr>
           <a:xfrm>
             <a:off x="548640" y="1325880"/>
-            <a:ext cx="11064240" cy="548640"/>
+            <a:ext cx="11091672" cy="548640"/>
           </a:xfrm>
           <a:prstGeom prst="rect">
             <a:avLst/>
@@ -26755,7 +26839,7 @@
         <p:spPr>
           <a:xfrm>
             <a:off x="1188720" y="1965960"/>
-            <a:ext cx="4462272" cy="738835"/>
+            <a:ext cx="4898989" cy="738835"/>
           </a:xfrm>
           <a:prstGeom prst="rect">
             <a:avLst/>
@@ -26795,8 +26879,8 @@
         </p:nvSpPr>
         <p:spPr>
           <a:xfrm>
-            <a:off x="5879592" y="2002536"/>
-            <a:ext cx="5760720" cy="665683"/>
+            <a:off x="6316309" y="2002536"/>
+            <a:ext cx="5324003" cy="665683"/>
           </a:xfrm>
           <a:prstGeom prst="roundRect">
             <a:avLst>
@@ -26822,8 +26906,8 @@
         </p:nvSpPr>
         <p:spPr>
           <a:xfrm>
-            <a:off x="5971032" y="2002536"/>
-            <a:ext cx="5577840" cy="665683"/>
+            <a:off x="6407749" y="2002536"/>
+            <a:ext cx="5141123" cy="665683"/>
           </a:xfrm>
           <a:prstGeom prst="rect">
             <a:avLst/>
@@ -26927,7 +27011,7 @@
         <p:spPr>
           <a:xfrm>
             <a:off x="1188720" y="2832811"/>
-            <a:ext cx="4462272" cy="738835"/>
+            <a:ext cx="4898989" cy="738835"/>
           </a:xfrm>
           <a:prstGeom prst="rect">
             <a:avLst/>
@@ -26967,8 +27051,8 @@
         </p:nvSpPr>
         <p:spPr>
           <a:xfrm>
-            <a:off x="5879592" y="2869387"/>
-            <a:ext cx="5760720" cy="665683"/>
+            <a:off x="6316309" y="2869387"/>
+            <a:ext cx="5324003" cy="665683"/>
           </a:xfrm>
           <a:prstGeom prst="roundRect">
             <a:avLst>
@@ -26994,8 +27078,8 @@
         </p:nvSpPr>
         <p:spPr>
           <a:xfrm>
-            <a:off x="5971032" y="2869387"/>
-            <a:ext cx="5577840" cy="665683"/>
+            <a:off x="6407749" y="2869387"/>
+            <a:ext cx="5141123" cy="665683"/>
           </a:xfrm>
           <a:prstGeom prst="rect">
             <a:avLst/>
@@ -27099,7 +27183,7 @@
         <p:spPr>
           <a:xfrm>
             <a:off x="1188720" y="3699662"/>
-            <a:ext cx="4462272" cy="738835"/>
+            <a:ext cx="4898989" cy="738835"/>
           </a:xfrm>
           <a:prstGeom prst="rect">
             <a:avLst/>
@@ -27139,8 +27223,8 @@
         </p:nvSpPr>
         <p:spPr>
           <a:xfrm>
-            <a:off x="5879592" y="3736238"/>
-            <a:ext cx="5760720" cy="665683"/>
+            <a:off x="6316309" y="3736238"/>
+            <a:ext cx="5324003" cy="665683"/>
           </a:xfrm>
           <a:prstGeom prst="roundRect">
             <a:avLst>
@@ -27166,8 +27250,8 @@
         </p:nvSpPr>
         <p:spPr>
           <a:xfrm>
-            <a:off x="5971032" y="3736238"/>
-            <a:ext cx="5577840" cy="665683"/>
+            <a:off x="6407749" y="3736238"/>
+            <a:ext cx="5141123" cy="665683"/>
           </a:xfrm>
           <a:prstGeom prst="rect">
             <a:avLst/>
@@ -27271,7 +27355,7 @@
         <p:spPr>
           <a:xfrm>
             <a:off x="1188720" y="4566514"/>
-            <a:ext cx="4462272" cy="738835"/>
+            <a:ext cx="4898989" cy="738835"/>
           </a:xfrm>
           <a:prstGeom prst="rect">
             <a:avLst/>
@@ -27338,8 +27422,8 @@
         </p:nvSpPr>
         <p:spPr>
           <a:xfrm>
-            <a:off x="5879592" y="4603090"/>
-            <a:ext cx="5760720" cy="665683"/>
+            <a:off x="6316309" y="4603090"/>
+            <a:ext cx="5324003" cy="665683"/>
           </a:xfrm>
           <a:prstGeom prst="roundRect">
             <a:avLst>
@@ -27365,8 +27449,8 @@
         </p:nvSpPr>
         <p:spPr>
           <a:xfrm>
-            <a:off x="5971032" y="4603090"/>
-            <a:ext cx="5577840" cy="665683"/>
+            <a:off x="6407749" y="4603090"/>
+            <a:ext cx="5141123" cy="665683"/>
           </a:xfrm>
           <a:prstGeom prst="rect">
             <a:avLst/>
@@ -27497,7 +27581,7 @@
         <p:spPr>
           <a:xfrm>
             <a:off x="1188720" y="5433365"/>
-            <a:ext cx="4462272" cy="738835"/>
+            <a:ext cx="4898989" cy="738835"/>
           </a:xfrm>
           <a:prstGeom prst="rect">
             <a:avLst/>
@@ -27515,14 +27599,14 @@
               <a:buNone/>
             </a:pPr>
             <a:r>
-              <a:rPr lang="en-US" sz="2400" dirty="0">
+              <a:rPr lang="en-US" sz="2300" dirty="0">
                 <a:solidFill>
                   <a:srgbClr val="14142B"/>
                 </a:solidFill>
               </a:rPr>
               <a:t>¿Qué hace María todos los días?</a:t>
             </a:r>
-            <a:endParaRPr lang="en-US" sz="2400" dirty="0"/>
+            <a:endParaRPr lang="en-US" sz="2300" dirty="0"/>
           </a:p>
         </p:txBody>
       </p:sp>
@@ -27534,8 +27618,8 @@
         </p:nvSpPr>
         <p:spPr>
           <a:xfrm>
-            <a:off x="5879592" y="5469941"/>
-            <a:ext cx="5760720" cy="665683"/>
+            <a:off x="6316309" y="5469941"/>
+            <a:ext cx="5324003" cy="665683"/>
           </a:xfrm>
           <a:prstGeom prst="roundRect">
             <a:avLst>
@@ -27561,8 +27645,8 @@
         </p:nvSpPr>
         <p:spPr>
           <a:xfrm>
-            <a:off x="5971032" y="5469941"/>
-            <a:ext cx="5577840" cy="665683"/>
+            <a:off x="6407749" y="5469941"/>
+            <a:ext cx="5141123" cy="665683"/>
           </a:xfrm>
           <a:prstGeom prst="rect">
             <a:avLst/>
@@ -28580,14 +28664,14 @@
               <a:buChar char="•"/>
             </a:pPr>
             <a:r>
-              <a:rPr lang="en-US" sz="2400" dirty="0">
+              <a:rPr lang="en-US" sz="2800" dirty="0">
                 <a:solidFill>
                   <a:srgbClr val="14142B"/>
                 </a:solidFill>
               </a:rPr>
               <a:t>Orden de presentaciones de la clase 8</a:t>
             </a:r>
-            <a:endParaRPr lang="en-US" sz="2400" dirty="0"/>
+            <a:endParaRPr lang="en-US" sz="2800" dirty="0"/>
           </a:p>
           <a:p>
             <a:pPr marL="228600" indent="-228600" eaLnBrk="1">
@@ -28598,14 +28682,14 @@
               <a:buChar char="•"/>
             </a:pPr>
             <a:r>
-              <a:rPr lang="en-US" sz="2400" dirty="0">
+              <a:rPr lang="en-US" sz="2800" dirty="0">
                 <a:solidFill>
                   <a:srgbClr val="14142B"/>
                 </a:solidFill>
               </a:rPr>
               <a:t>Están todos los inscritos, también quien falte hoy</a:t>
             </a:r>
-            <a:endParaRPr lang="en-US" sz="2400" dirty="0"/>
+            <a:endParaRPr lang="en-US" sz="2800" dirty="0"/>
           </a:p>
           <a:p>
             <a:pPr marL="228600" indent="-228600" eaLnBrk="1">
@@ -28616,14 +28700,14 @@
               <a:buChar char="•"/>
             </a:pPr>
             <a:r>
-              <a:rPr lang="en-US" sz="2400" dirty="0">
+              <a:rPr lang="en-US" sz="2800" dirty="0">
                 <a:solidFill>
                   <a:srgbClr val="14142B"/>
                 </a:solidFill>
               </a:rPr>
               <a:t>La lista se publica en el grupo después de la clase</a:t>
             </a:r>
-            <a:endParaRPr lang="en-US" sz="2400" dirty="0"/>
+            <a:endParaRPr lang="en-US" sz="2800" dirty="0"/>
           </a:p>
         </p:txBody>
       </p:sp>
@@ -29410,7 +29494,7 @@
           <p:nvPr>
             <p:extLst>
               <p:ext uri="{D42A27DB-BD31-4B8C-83A1-F6EECF244321}">
-                <p14:modId xmlns:p14="http://schemas.microsoft.com/office/powerpoint/2010/main" val="2392308424"/>
+                <p14:modId xmlns:p14="http://schemas.microsoft.com/office/powerpoint/2010/main" val="2327117969"/>
               </p:ext>
             </p:extLst>
           </p:nvPr>
@@ -30478,7 +30562,7 @@
         <p:spPr>
           <a:xfrm>
             <a:off x="548640" y="1325880"/>
-            <a:ext cx="6949440" cy="4846320"/>
+            <a:ext cx="5669280" cy="4846320"/>
           </a:xfrm>
           <a:prstGeom prst="rect">
             <a:avLst/>
@@ -30497,60 +30581,30 @@
           </a:p>
         </p:txBody>
       </p:sp>
-      <p:sp>
-        <p:nvSpPr>
-          <p:cNvPr id="4" name="imagen_pendiente"/>
-          <p:cNvSpPr txBox="1"/>
+      <p:pic>
+        <p:nvPicPr>
+          <p:cNvPr id="4" name="imagen" descr="C:\Users\Chingu\AppData\Local\Temp\claude\C--Users-Chingu-Desktop-ACADEMIASEULWEB\d4111e1b-5523-44ea-97b2-b1a1d9545b9e\scratchpad\decks\cache\img_8ba59155696d89a6.png"/>
+          <p:cNvPicPr>
+            <a:picLocks noChangeAspect="1"/>
+          </p:cNvPicPr>
           <p:nvPr/>
-        </p:nvSpPr>
-        <p:spPr>
-          <a:xfrm>
-            <a:off x="548640" y="1600200"/>
-            <a:ext cx="11091672" cy="4114800"/>
+        </p:nvPicPr>
+        <p:blipFill>
+          <a:blip r:embed="rId3"/>
+          <a:stretch>
+            <a:fillRect/>
+          </a:stretch>
+        </p:blipFill>
+        <p:spPr>
+          <a:xfrm>
+            <a:off x="3992756" y="1325880"/>
+            <a:ext cx="4203441" cy="4846320"/>
           </a:xfrm>
           <a:prstGeom prst="rect">
             <a:avLst/>
           </a:prstGeom>
-          <a:solidFill>
-            <a:srgbClr val="F1F0FE"/>
-          </a:solidFill>
-          <a:ln/>
-        </p:spPr>
-        <p:txBody>
-          <a:bodyPr wrap="square" lIns="76200" tIns="76200" rIns="76200" bIns="76200" rtlCol="0" anchor="ctr">
-            <a:normAutofit/>
-          </a:bodyPr>
-          <a:lstStyle/>
-          <a:p>
-            <a:pPr marL="0" indent="0" algn="ctr" eaLnBrk="1">
-              <a:buNone/>
-            </a:pPr>
-            <a:r>
-              <a:rPr lang="en-US" sz="2400" b="1" dirty="0">
-                <a:solidFill>
-                  <a:srgbClr val="4236F6"/>
-                </a:solidFill>
-              </a:rPr>
-              <a:t>Imagen pendiente</a:t>
-            </a:r>
-            <a:endParaRPr lang="en-US" sz="2400" dirty="0"/>
-          </a:p>
-          <a:p>
-            <a:pPr marL="0" indent="0" algn="ctr" eaLnBrk="1">
-              <a:buNone/>
-            </a:pPr>
-            <a:r>
-              <a:rPr lang="en-US" sz="1800" dirty="0">
-                <a:solidFill>
-                  <a:srgbClr val="5C5F6B"/>
-                </a:solidFill>
-              </a:rPr>
-              <a:t>Dibujo nuevo de la pieza de Kiran, sin texto: cama junto a la ventana · ventana · escritorio con computador encima · silla · foto sobre el escritorio · clóset con un espejo al lado · un dibujo (cuadro) · puerta · sin televisor</a:t>
-            </a:r>
-            <a:endParaRPr lang="en-US" sz="2400" dirty="0"/>
-          </a:p>
-        </p:txBody>
-      </p:sp>
+        </p:spPr>
+      </p:pic>
       <p:sp>
         <p:nvSpPr>
           <p:cNvPr id="25" name="Slide Number Placeholder 0"/>
@@ -30835,7 +30889,7 @@
         <p:spPr>
           <a:xfrm>
             <a:off x="621792" y="3728923"/>
-            <a:ext cx="5285232" cy="1574597"/>
+            <a:ext cx="5285232" cy="1912925"/>
           </a:xfrm>
           <a:prstGeom prst="rect">
             <a:avLst/>
@@ -30997,7 +31051,7 @@
         <p:spPr>
           <a:xfrm>
             <a:off x="6281928" y="3728923"/>
-            <a:ext cx="5285232" cy="1574597"/>
+            <a:ext cx="5285232" cy="1912925"/>
           </a:xfrm>
           <a:prstGeom prst="rect">
             <a:avLst/>
@@ -31147,16 +31201,40 @@
           </a:p>
         </p:txBody>
       </p:sp>
-      <p:sp>
-        <p:nvSpPr>
-          <p:cNvPr id="3" name="Text 1"/>
+      <p:pic>
+        <p:nvPicPr>
+          <p:cNvPr id="3" name="imagen" descr="C:\Users\Chingu\AppData\Local\Temp\claude\C--Users-Chingu-Desktop-ACADEMIASEULWEB\d4111e1b-5523-44ea-97b2-b1a1d9545b9e\scratchpad\decks\cache\img_e2e16e221377aa6f.png"/>
+          <p:cNvPicPr>
+            <a:picLocks noChangeAspect="1"/>
+          </p:cNvPicPr>
+          <p:nvPr/>
+        </p:nvPicPr>
+        <p:blipFill>
+          <a:blip r:embed="rId3"/>
+          <a:stretch>
+            <a:fillRect/>
+          </a:stretch>
+        </p:blipFill>
+        <p:spPr>
+          <a:xfrm>
+            <a:off x="7754112" y="1508760"/>
+            <a:ext cx="3886200" cy="4480560"/>
+          </a:xfrm>
+          <a:prstGeom prst="rect">
+            <a:avLst/>
+          </a:prstGeom>
+        </p:spPr>
+      </p:pic>
+      <p:sp>
+        <p:nvSpPr>
+          <p:cNvPr id="4" name="Text 1"/>
           <p:cNvSpPr txBox="1"/>
           <p:nvPr/>
         </p:nvSpPr>
         <p:spPr>
           <a:xfrm>
             <a:off x="548640" y="1325880"/>
-            <a:ext cx="11064240" cy="548640"/>
+            <a:ext cx="6931152" cy="548640"/>
           </a:xfrm>
           <a:prstGeom prst="rect">
             <a:avLst/>
@@ -31187,7 +31265,7 @@
       </p:sp>
       <p:sp>
         <p:nvSpPr>
-          <p:cNvPr id="4" name="num_0"/>
+          <p:cNvPr id="5" name="num_0"/>
           <p:cNvSpPr/>
           <p:nvPr/>
         </p:nvSpPr>
@@ -31212,7 +31290,7 @@
       </p:sp>
       <p:sp>
         <p:nvSpPr>
-          <p:cNvPr id="5" name="Text 3"/>
+          <p:cNvPr id="6" name="Text 3"/>
           <p:cNvSpPr txBox="1"/>
           <p:nvPr/>
         </p:nvSpPr>
@@ -31250,14 +31328,14 @@
       </p:sp>
       <p:sp>
         <p:nvSpPr>
-          <p:cNvPr id="6" name="Text 4"/>
+          <p:cNvPr id="7" name="Text 4"/>
           <p:cNvSpPr txBox="1"/>
           <p:nvPr/>
         </p:nvSpPr>
         <p:spPr>
           <a:xfrm>
             <a:off x="1188720" y="1965960"/>
-            <a:ext cx="6080760" cy="738835"/>
+            <a:ext cx="2735519" cy="738835"/>
           </a:xfrm>
           <a:prstGeom prst="rect">
             <a:avLst/>
@@ -31291,14 +31369,14 @@
       </p:sp>
       <p:sp>
         <p:nvSpPr>
-          <p:cNvPr id="7" name="rev_5_caja"/>
+          <p:cNvPr id="8" name="rev_5_caja"/>
           <p:cNvSpPr/>
           <p:nvPr/>
         </p:nvSpPr>
         <p:spPr>
           <a:xfrm>
-            <a:off x="7498080" y="2002536"/>
-            <a:ext cx="4142232" cy="665683"/>
+            <a:off x="4152839" y="2002536"/>
+            <a:ext cx="3326953" cy="665683"/>
           </a:xfrm>
           <a:prstGeom prst="roundRect">
             <a:avLst>
@@ -31318,14 +31396,14 @@
       </p:sp>
       <p:sp>
         <p:nvSpPr>
-          <p:cNvPr id="8" name="rev_5_txt"/>
+          <p:cNvPr id="9" name="rev_5_txt"/>
           <p:cNvSpPr txBox="1"/>
           <p:nvPr/>
         </p:nvSpPr>
         <p:spPr>
           <a:xfrm>
-            <a:off x="7589520" y="2002536"/>
-            <a:ext cx="3959352" cy="665683"/>
+            <a:off x="4244279" y="2002536"/>
+            <a:ext cx="3144073" cy="665683"/>
           </a:xfrm>
           <a:prstGeom prst="rect">
             <a:avLst/>
@@ -31367,7 +31445,7 @@
       </p:sp>
       <p:sp>
         <p:nvSpPr>
-          <p:cNvPr id="9" name="num_1"/>
+          <p:cNvPr id="10" name="num_1"/>
           <p:cNvSpPr/>
           <p:nvPr/>
         </p:nvSpPr>
@@ -31392,7 +31470,7 @@
       </p:sp>
       <p:sp>
         <p:nvSpPr>
-          <p:cNvPr id="10" name="Text 8"/>
+          <p:cNvPr id="11" name="Text 8"/>
           <p:cNvSpPr txBox="1"/>
           <p:nvPr/>
         </p:nvSpPr>
@@ -31430,14 +31508,14 @@
       </p:sp>
       <p:sp>
         <p:nvSpPr>
-          <p:cNvPr id="11" name="Text 9"/>
+          <p:cNvPr id="12" name="Text 9"/>
           <p:cNvSpPr txBox="1"/>
           <p:nvPr/>
         </p:nvSpPr>
         <p:spPr>
           <a:xfrm>
             <a:off x="1188720" y="2832811"/>
-            <a:ext cx="6080760" cy="738835"/>
+            <a:ext cx="2735519" cy="738835"/>
           </a:xfrm>
           <a:prstGeom prst="rect">
             <a:avLst/>
@@ -31471,14 +31549,14 @@
       </p:sp>
       <p:sp>
         <p:nvSpPr>
-          <p:cNvPr id="12" name="rev_6_caja"/>
+          <p:cNvPr id="13" name="rev_6_caja"/>
           <p:cNvSpPr/>
           <p:nvPr/>
         </p:nvSpPr>
         <p:spPr>
           <a:xfrm>
-            <a:off x="7498080" y="2869387"/>
-            <a:ext cx="4142232" cy="665683"/>
+            <a:off x="4152839" y="2869387"/>
+            <a:ext cx="3326953" cy="665683"/>
           </a:xfrm>
           <a:prstGeom prst="roundRect">
             <a:avLst>
@@ -31498,14 +31576,14 @@
       </p:sp>
       <p:sp>
         <p:nvSpPr>
-          <p:cNvPr id="13" name="rev_6_txt"/>
+          <p:cNvPr id="14" name="rev_6_txt"/>
           <p:cNvSpPr txBox="1"/>
           <p:nvPr/>
         </p:nvSpPr>
         <p:spPr>
           <a:xfrm>
-            <a:off x="7589520" y="2869387"/>
-            <a:ext cx="3959352" cy="665683"/>
+            <a:off x="4244279" y="2869387"/>
+            <a:ext cx="3144073" cy="665683"/>
           </a:xfrm>
           <a:prstGeom prst="rect">
             <a:avLst/>
@@ -31547,7 +31625,7 @@
       </p:sp>
       <p:sp>
         <p:nvSpPr>
-          <p:cNvPr id="14" name="num_2"/>
+          <p:cNvPr id="15" name="num_2"/>
           <p:cNvSpPr/>
           <p:nvPr/>
         </p:nvSpPr>
@@ -31572,7 +31650,7 @@
       </p:sp>
       <p:sp>
         <p:nvSpPr>
-          <p:cNvPr id="15" name="Text 13"/>
+          <p:cNvPr id="16" name="Text 13"/>
           <p:cNvSpPr txBox="1"/>
           <p:nvPr/>
         </p:nvSpPr>
@@ -31610,14 +31688,14 @@
       </p:sp>
       <p:sp>
         <p:nvSpPr>
-          <p:cNvPr id="16" name="Text 14"/>
+          <p:cNvPr id="17" name="Text 14"/>
           <p:cNvSpPr txBox="1"/>
           <p:nvPr/>
         </p:nvSpPr>
         <p:spPr>
           <a:xfrm>
             <a:off x="1188720" y="3699662"/>
-            <a:ext cx="6080760" cy="738835"/>
+            <a:ext cx="2735519" cy="738835"/>
           </a:xfrm>
           <a:prstGeom prst="rect">
             <a:avLst/>
@@ -31651,14 +31729,14 @@
       </p:sp>
       <p:sp>
         <p:nvSpPr>
-          <p:cNvPr id="17" name="rev_7_caja"/>
+          <p:cNvPr id="18" name="rev_7_caja"/>
           <p:cNvSpPr/>
           <p:nvPr/>
         </p:nvSpPr>
         <p:spPr>
           <a:xfrm>
-            <a:off x="7498080" y="3736238"/>
-            <a:ext cx="4142232" cy="665683"/>
+            <a:off x="4152839" y="3736238"/>
+            <a:ext cx="3326953" cy="665683"/>
           </a:xfrm>
           <a:prstGeom prst="roundRect">
             <a:avLst>
@@ -31678,14 +31756,14 @@
       </p:sp>
       <p:sp>
         <p:nvSpPr>
-          <p:cNvPr id="18" name="rev_7_txt"/>
+          <p:cNvPr id="19" name="rev_7_txt"/>
           <p:cNvSpPr txBox="1"/>
           <p:nvPr/>
         </p:nvSpPr>
         <p:spPr>
           <a:xfrm>
-            <a:off x="7589520" y="3736238"/>
-            <a:ext cx="3959352" cy="665683"/>
+            <a:off x="4244279" y="3736238"/>
+            <a:ext cx="3144073" cy="665683"/>
           </a:xfrm>
           <a:prstGeom prst="rect">
             <a:avLst/>
@@ -31727,7 +31805,7 @@
       </p:sp>
       <p:sp>
         <p:nvSpPr>
-          <p:cNvPr id="19" name="num_3"/>
+          <p:cNvPr id="20" name="num_3"/>
           <p:cNvSpPr/>
           <p:nvPr/>
         </p:nvSpPr>
@@ -31752,7 +31830,7 @@
       </p:sp>
       <p:sp>
         <p:nvSpPr>
-          <p:cNvPr id="20" name="Text 18"/>
+          <p:cNvPr id="21" name="Text 18"/>
           <p:cNvSpPr txBox="1"/>
           <p:nvPr/>
         </p:nvSpPr>
@@ -31790,14 +31868,14 @@
       </p:sp>
       <p:sp>
         <p:nvSpPr>
-          <p:cNvPr id="21" name="Text 19"/>
+          <p:cNvPr id="22" name="Text 19"/>
           <p:cNvSpPr txBox="1"/>
           <p:nvPr/>
         </p:nvSpPr>
         <p:spPr>
           <a:xfrm>
             <a:off x="1188720" y="4566514"/>
-            <a:ext cx="6080760" cy="738835"/>
+            <a:ext cx="2735519" cy="738835"/>
           </a:xfrm>
           <a:prstGeom prst="rect">
             <a:avLst/>
@@ -31831,14 +31909,14 @@
       </p:sp>
       <p:sp>
         <p:nvSpPr>
-          <p:cNvPr id="22" name="rev_8_caja"/>
+          <p:cNvPr id="23" name="rev_8_caja"/>
           <p:cNvSpPr/>
           <p:nvPr/>
         </p:nvSpPr>
         <p:spPr>
           <a:xfrm>
-            <a:off x="7498080" y="4603090"/>
-            <a:ext cx="4142232" cy="665683"/>
+            <a:off x="4152839" y="4603090"/>
+            <a:ext cx="3326953" cy="665683"/>
           </a:xfrm>
           <a:prstGeom prst="roundRect">
             <a:avLst>
@@ -31858,14 +31936,14 @@
       </p:sp>
       <p:sp>
         <p:nvSpPr>
-          <p:cNvPr id="23" name="rev_8_txt"/>
+          <p:cNvPr id="24" name="rev_8_txt"/>
           <p:cNvSpPr txBox="1"/>
           <p:nvPr/>
         </p:nvSpPr>
         <p:spPr>
           <a:xfrm>
-            <a:off x="7589520" y="4603090"/>
-            <a:ext cx="3959352" cy="665683"/>
+            <a:off x="4244279" y="4603090"/>
+            <a:ext cx="3144073" cy="665683"/>
           </a:xfrm>
           <a:prstGeom prst="rect">
             <a:avLst/>
@@ -31907,7 +31985,7 @@
       </p:sp>
       <p:sp>
         <p:nvSpPr>
-          <p:cNvPr id="24" name="num_4"/>
+          <p:cNvPr id="25" name="num_4"/>
           <p:cNvSpPr/>
           <p:nvPr/>
         </p:nvSpPr>
@@ -31932,7 +32010,7 @@
       </p:sp>
       <p:sp>
         <p:nvSpPr>
-          <p:cNvPr id="25" name="Text 23"/>
+          <p:cNvPr id="26" name="Text 23"/>
           <p:cNvSpPr txBox="1"/>
           <p:nvPr/>
         </p:nvSpPr>
@@ -31970,14 +32048,14 @@
       </p:sp>
       <p:sp>
         <p:nvSpPr>
-          <p:cNvPr id="26" name="Text 24"/>
+          <p:cNvPr id="27" name="Text 24"/>
           <p:cNvSpPr txBox="1"/>
           <p:nvPr/>
         </p:nvSpPr>
         <p:spPr>
           <a:xfrm>
             <a:off x="1188720" y="5433365"/>
-            <a:ext cx="6080760" cy="738835"/>
+            <a:ext cx="2735519" cy="738835"/>
           </a:xfrm>
           <a:prstGeom prst="rect">
             <a:avLst/>
@@ -32011,14 +32089,14 @@
       </p:sp>
       <p:sp>
         <p:nvSpPr>
-          <p:cNvPr id="27" name="rev_9_caja"/>
+          <p:cNvPr id="28" name="rev_9_caja"/>
           <p:cNvSpPr/>
           <p:nvPr/>
         </p:nvSpPr>
         <p:spPr>
           <a:xfrm>
-            <a:off x="7498080" y="5469941"/>
-            <a:ext cx="4142232" cy="665683"/>
+            <a:off x="4152839" y="5469941"/>
+            <a:ext cx="3326953" cy="665683"/>
           </a:xfrm>
           <a:prstGeom prst="roundRect">
             <a:avLst>
@@ -32038,14 +32116,14 @@
       </p:sp>
       <p:sp>
         <p:nvSpPr>
-          <p:cNvPr id="28" name="rev_9_txt"/>
+          <p:cNvPr id="29" name="rev_9_txt"/>
           <p:cNvSpPr txBox="1"/>
           <p:nvPr/>
         </p:nvSpPr>
         <p:spPr>
           <a:xfrm>
-            <a:off x="7589520" y="5469941"/>
-            <a:ext cx="3959352" cy="665683"/>
+            <a:off x="4244279" y="5469941"/>
+            <a:ext cx="3144073" cy="665683"/>
           </a:xfrm>
           <a:prstGeom prst="rect">
             <a:avLst/>
@@ -32087,7 +32165,7 @@
       </p:sp>
       <p:sp>
         <p:nvSpPr>
-          <p:cNvPr id="29" name="Slide Number Placeholder 0"/>
+          <p:cNvPr id="30" name="Slide Number Placeholder 0"/>
           <p:cNvSpPr>
             <a:spLocks noGrp="1"/>
           </p:cNvSpPr>
@@ -32172,7 +32250,7 @@
                                           </p:stCondLst>
                                         </p:cTn>
                                         <p:tgtEl>
-                                          <p:spTgt spid="7"/>
+                                          <p:spTgt spid="8"/>
                                         </p:tgtEl>
                                         <p:attrNameLst>
                                           <p:attrName>style.visibility</p:attrName>
@@ -32199,7 +32277,7 @@
                                           </p:stCondLst>
                                         </p:cTn>
                                         <p:tgtEl>
-                                          <p:spTgt spid="8"/>
+                                          <p:spTgt spid="9"/>
                                         </p:tgtEl>
                                         <p:attrNameLst>
                                           <p:attrName>style.visibility</p:attrName>
@@ -32244,7 +32322,7 @@
                                           </p:stCondLst>
                                         </p:cTn>
                                         <p:tgtEl>
-                                          <p:spTgt spid="12"/>
+                                          <p:spTgt spid="13"/>
                                         </p:tgtEl>
                                         <p:attrNameLst>
                                           <p:attrName>style.visibility</p:attrName>
@@ -32271,7 +32349,7 @@
                                           </p:stCondLst>
                                         </p:cTn>
                                         <p:tgtEl>
-                                          <p:spTgt spid="13"/>
+                                          <p:spTgt spid="14"/>
                                         </p:tgtEl>
                                         <p:attrNameLst>
                                           <p:attrName>style.visibility</p:attrName>
@@ -32316,7 +32394,7 @@
                                           </p:stCondLst>
                                         </p:cTn>
                                         <p:tgtEl>
-                                          <p:spTgt spid="17"/>
+                                          <p:spTgt spid="18"/>
                                         </p:tgtEl>
                                         <p:attrNameLst>
                                           <p:attrName>style.visibility</p:attrName>
@@ -32343,7 +32421,7 @@
                                           </p:stCondLst>
                                         </p:cTn>
                                         <p:tgtEl>
-                                          <p:spTgt spid="18"/>
+                                          <p:spTgt spid="19"/>
                                         </p:tgtEl>
                                         <p:attrNameLst>
                                           <p:attrName>style.visibility</p:attrName>
@@ -32388,7 +32466,7 @@
                                           </p:stCondLst>
                                         </p:cTn>
                                         <p:tgtEl>
-                                          <p:spTgt spid="22"/>
+                                          <p:spTgt spid="23"/>
                                         </p:tgtEl>
                                         <p:attrNameLst>
                                           <p:attrName>style.visibility</p:attrName>
@@ -32415,7 +32493,7 @@
                                           </p:stCondLst>
                                         </p:cTn>
                                         <p:tgtEl>
-                                          <p:spTgt spid="23"/>
+                                          <p:spTgt spid="24"/>
                                         </p:tgtEl>
                                         <p:attrNameLst>
                                           <p:attrName>style.visibility</p:attrName>
@@ -32460,7 +32538,7 @@
                                           </p:stCondLst>
                                         </p:cTn>
                                         <p:tgtEl>
-                                          <p:spTgt spid="27"/>
+                                          <p:spTgt spid="28"/>
                                         </p:tgtEl>
                                         <p:attrNameLst>
                                           <p:attrName>style.visibility</p:attrName>
@@ -32487,7 +32565,7 @@
                                           </p:stCondLst>
                                         </p:cTn>
                                         <p:tgtEl>
-                                          <p:spTgt spid="28"/>
+                                          <p:spTgt spid="29"/>
                                         </p:tgtEl>
                                         <p:attrNameLst>
                                           <p:attrName>style.visibility</p:attrName>
@@ -32528,11 +32606,11 @@
       </p:par>
     </p:tnLst>
     <p:bldLst>
-      <p:bldP spid="8" grpId="0" animBg="1"/>
-      <p:bldP spid="13" grpId="0" animBg="1"/>
-      <p:bldP spid="18" grpId="0" animBg="1"/>
-      <p:bldP spid="23" grpId="0" animBg="1"/>
-      <p:bldP spid="28" grpId="0" animBg="1"/>
+      <p:bldP spid="9" grpId="0" animBg="1"/>
+      <p:bldP spid="14" grpId="0" animBg="1"/>
+      <p:bldP spid="19" grpId="0" animBg="1"/>
+      <p:bldP spid="24" grpId="0" animBg="1"/>
+      <p:bldP spid="29" grpId="0" animBg="1"/>
     </p:bldLst>
   </p:timing>
 </p:sld>
@@ -33145,7 +33223,7 @@
         <p:spPr>
           <a:xfrm>
             <a:off x="548640" y="1325880"/>
-            <a:ext cx="11064240" cy="457200"/>
+            <a:ext cx="11091672" cy="457200"/>
           </a:xfrm>
           <a:prstGeom prst="rect">
             <a:avLst/>

--- a/Curriculo/Fase2_Basico1/decks/Basico1_S07_Kiran.pptx
+++ b/Curriculo/Fase2_Basico1/decks/Basico1_S07_Kiran.pptx
@@ -139,7 +139,7 @@
   <p:extLst>
     <p:ext uri="{521415D9-36F7-43E2-AB2F-B90AF26B5E84}">
       <p14:sectionLst xmlns:p14="http://schemas.microsoft.com/office/powerpoint/2010/main">
-        <p14:section name="Semana 7" id="{6A19CB79-634E-153E-5B19-92B40CAB670E}">
+        <p14:section name="Semana 7" id="{9D2DB0BB-1453-6DB3-4997-F05CBEA7AF7A}">
           <p14:sldIdLst>
             <p14:sldId id="256"/>
             <p14:sldId id="257"/>
@@ -210,7 +210,7 @@
     </p:spTree>
     <p:extLst>
       <p:ext uri="{BB962C8B-B14F-4D97-AF65-F5344CB8AC3E}">
-        <p14:creationId xmlns:p14="http://schemas.microsoft.com/office/powerpoint/2010/main" val="1085207909"/>
+        <p14:creationId xmlns:p14="http://schemas.microsoft.com/office/powerpoint/2010/main" val="1479890120"/>
       </p:ext>
     </p:extLst>
   </p:cSld>
@@ -356,7 +356,7 @@
           <a:p>
             <a:r>
               <a:rPr lang="en-US" dirty="0"/>
-              <a:t>10 minutos antes: deck abierto en esta lámina, barajador de listas listo en otra pestaña y sobre el escritorio un libro, audífonos, un lápiz y una hoja. Graba desde el minuto 0 (Basico1-Martes_S07_2026-11-24 o Basico1-Jueves_S07_2026-11-26). 20:00: saluda con 안녕하세요! y pasa al quiz.
+              <a:t>10 minutos antes: deck abierto en esta lámina, barajador de listas listo en otra pestaña y sobre el escritorio un libro, audífonos, un lápiz y una hoja. Graba desde el minuto 0 (Basico1-Martes_S07_2026-12-01 o Basico1-Jueves_S07_2026-12-03). 20:00: saluda con 안녕하세요! y pasa al quiz.
 Fuente: S07_Guia_Profesor.md · C.15 #1 · C.2 (10 minutos antes)
 Lámina 1</a:t>
             </a:r>
@@ -2405,7 +2405,7 @@
           <a:p>
             <a:r>
               <a:rPr lang="en-US" dirty="0"/>
-              <a:t>ES: “El examen escrito en línea dura 30 minutos y lo rindes antes de la clase 8. Tu repaso es la hoja 7–8: hazla antes del examen.” Di la ventana de tu sección. El link lo publicas en el grupo cuando Jay lo confirme: [PLACEHOLDER: link del formulario — lo confirma Jay]. No prometas nada fuera de lo confirmado.
+              <a:t>ES: “El examen escrito en línea dura 30 minutos y lo rindes antes de la clase 8. Tu repaso es la hoja 7–8: hazla antes del examen.” Di la ventana de tu sección (el mar 8 de diciembre es feriado en Chile: Jay confirma si se mantiene la clase 8 del martes; si cambia, usa la fecha nueva). El link lo publicas en el grupo cuando Jay lo confirme: [PLACEHOLDER: link del formulario — lo confirma Jay]. No prometas nada fuera de lo confirmado.
 Fuente: S07_Guia_Profesor.md · C.15 #27 · C.3 (examen) · C.13 · material §9.4
 Lámina 27</a:t>
             </a:r>
@@ -4349,7 +4349,7 @@
                   <a:srgbClr val="E8B84B"/>
                 </a:solidFill>
               </a:rPr>
-              <a:t>Martes 24 / jueves 26 de noviembre · 20:00 (hora de Chile)</a:t>
+              <a:t>Martes 1 / jueves 3 de diciembre · 20:00 (hora de Chile)</a:t>
             </a:r>
             <a:endParaRPr lang="en-US" sz="2200" dirty="0"/>
           </a:p>
@@ -18076,7 +18076,7 @@
           <p:nvPr>
             <p:extLst>
               <p:ext uri="{D42A27DB-BD31-4B8C-83A1-F6EECF244321}">
-                <p14:modId xmlns:p14="http://schemas.microsoft.com/office/powerpoint/2010/main" val="4019295845"/>
+                <p14:modId xmlns:p14="http://schemas.microsoft.com/office/powerpoint/2010/main" val="912636775"/>
               </p:ext>
             </p:extLst>
           </p:nvPr>
@@ -19684,7 +19684,7 @@
           <p:nvPr>
             <p:extLst>
               <p:ext uri="{D42A27DB-BD31-4B8C-83A1-F6EECF244321}">
-                <p14:modId xmlns:p14="http://schemas.microsoft.com/office/powerpoint/2010/main" val="2655591259"/>
+                <p14:modId xmlns:p14="http://schemas.microsoft.com/office/powerpoint/2010/main" val="3935773795"/>
               </p:ext>
             </p:extLst>
           </p:nvPr>
@@ -24541,7 +24541,7 @@
           <p:nvPr>
             <p:extLst>
               <p:ext uri="{D42A27DB-BD31-4B8C-83A1-F6EECF244321}">
-                <p14:modId xmlns:p14="http://schemas.microsoft.com/office/powerpoint/2010/main" val="1438645504"/>
+                <p14:modId xmlns:p14="http://schemas.microsoft.com/office/powerpoint/2010/main" val="2518668799"/>
               </p:ext>
             </p:extLst>
           </p:nvPr>
@@ -26533,7 +26533,7 @@
                   <a:srgbClr val="14142B"/>
                 </a:solidFill>
               </a:rPr>
-              <a:t>A Kiran, 48 h después de tu clase 7: mar → jue 26 nov · jue → sáb 28 nov, 20:00</a:t>
+              <a:t>A Kiran, 48 h después de tu clase 7: mar → jue 3 dic · jue → sáb 5 dic, 20:00</a:t>
             </a:r>
             <a:endParaRPr lang="en-US" sz="2000" dirty="0"/>
           </a:p>
@@ -28363,7 +28363,7 @@
                   <a:srgbClr val="14142B"/>
                 </a:solidFill>
               </a:rPr>
-              <a:t>Sección martes: abre dom 29 nov, 20:00 → cierra mar 1 dic, 20:00</a:t>
+              <a:t>Sección martes: abre dom 6 dic, 20:00 → cierra mar 8 dic, 20:00 [por confirmar]</a:t>
             </a:r>
             <a:endParaRPr lang="en-US" sz="2000" dirty="0"/>
           </a:p>
@@ -28381,7 +28381,7 @@
                   <a:srgbClr val="14142B"/>
                 </a:solidFill>
               </a:rPr>
-              <a:t>Sección jueves: abre mar 1 dic, 20:00 → cierra jue 3 dic, 20:00</a:t>
+              <a:t>Sección jueves: abre mar 8 dic, 20:00 → cierra jue 10 dic, 20:00</a:t>
             </a:r>
             <a:endParaRPr lang="en-US" sz="2000" dirty="0"/>
           </a:p>
@@ -29406,7 +29406,7 @@
                   <a:srgbClr val="FFFFFF"/>
                 </a:solidFill>
               </a:rPr>
-              <a:t>Nos vemos en la clase 8: mar 1 / jue 3 dic, 20:00 (hora de Chile)</a:t>
+              <a:t>Nos vemos en la clase 8: mar 8 [por confirmar] / jue 10 dic, 20:00 (hora de Chile)</a:t>
             </a:r>
             <a:endParaRPr lang="en-US" sz="2200" dirty="0"/>
           </a:p>
@@ -29494,7 +29494,7 @@
           <p:nvPr>
             <p:extLst>
               <p:ext uri="{D42A27DB-BD31-4B8C-83A1-F6EECF244321}">
-                <p14:modId xmlns:p14="http://schemas.microsoft.com/office/powerpoint/2010/main" val="2327117969"/>
+                <p14:modId xmlns:p14="http://schemas.microsoft.com/office/powerpoint/2010/main" val="3401873361"/>
               </p:ext>
             </p:extLst>
           </p:nvPr>
